--- a/course/slides/AF-TRACKF-M05/AF-TRACKF-M05-v1.pptx
+++ b/course/slides/AF-TRACKF-M05/AF-TRACKF-M05-v1.pptx
@@ -8401,7 +8401,7 @@
         </p:blipFill>
         <p:spPr>
           <a:xfrm>
-            <a:off x="609600" y="3185160"/>
+            <a:off x="609600" y="3020060"/>
             <a:ext cx="1016000" cy="1016000"/>
           </a:xfrm>
           <a:prstGeom prst="rect">
@@ -8417,7 +8417,7 @@
         </p:nvSpPr>
         <p:spPr>
           <a:xfrm>
-            <a:off x="2070100" y="3147060"/>
+            <a:off x="2070100" y="2981960"/>
             <a:ext cx="9563100" cy="619760"/>
           </a:xfrm>
           <a:prstGeom prst="rect">
@@ -8456,8 +8456,8 @@
         </p:nvSpPr>
         <p:spPr>
           <a:xfrm>
-            <a:off x="2070100" y="3931920"/>
-            <a:ext cx="9563100" cy="355600"/>
+            <a:off x="2070100" y="3766820"/>
+            <a:ext cx="9563100" cy="685800"/>
           </a:xfrm>
           <a:prstGeom prst="rect">
             <a:avLst/>
@@ -8482,7 +8482,23 @@
                 </a:solidFill>
                 <a:latin typeface="Lexend"/>
               </a:rPr>
-              <a:t>Theo's cousin works at a grooming salon.</a:t>
+              <a:t>One morning, the booking app the salon used showed her another salon's</a:t>
+            </a:r>
+          </a:p>
+          <a:p>
+            <a:pPr algn="l">
+              <a:lnSpc>
+                <a:spcPts val="2600"/>
+              </a:lnSpc>
+            </a:pPr>
+            <a:r>
+              <a:rPr sz="2000" b="0">
+                <a:solidFill>
+                  <a:srgbClr val="756E65"/>
+                </a:solidFill>
+                <a:latin typeface="Lexend"/>
+              </a:rPr>
+              <a:t>client list, names and phone numbers included.</a:t>
             </a:r>
           </a:p>
         </p:txBody>
@@ -10647,7 +10663,7 @@
         </p:blipFill>
         <p:spPr>
           <a:xfrm>
-            <a:off x="609600" y="3185160"/>
+            <a:off x="609600" y="3020060"/>
             <a:ext cx="1016000" cy="1016000"/>
           </a:xfrm>
           <a:prstGeom prst="rect">
@@ -10663,7 +10679,7 @@
         </p:nvSpPr>
         <p:spPr>
           <a:xfrm>
-            <a:off x="2070100" y="3147060"/>
+            <a:off x="2070100" y="2981960"/>
             <a:ext cx="9563100" cy="619760"/>
           </a:xfrm>
           <a:prstGeom prst="rect">
@@ -10702,8 +10718,8 @@
         </p:nvSpPr>
         <p:spPr>
           <a:xfrm>
-            <a:off x="2070100" y="3931920"/>
-            <a:ext cx="9563100" cy="355600"/>
+            <a:off x="2070100" y="3766820"/>
+            <a:ext cx="9563100" cy="685800"/>
           </a:xfrm>
           <a:prstGeom prst="rect">
             <a:avLst/>
@@ -10728,7 +10744,23 @@
                 </a:solidFill>
                 <a:latin typeface="Lexend"/>
               </a:rPr>
-              <a:t>Some tables are shared on purpose.</a:t>
+              <a:t>Imagine one dog's record that two breeders both hold a claim on, with each</a:t>
+            </a:r>
+          </a:p>
+          <a:p>
+            <a:pPr algn="l">
+              <a:lnSpc>
+                <a:spcPts val="2600"/>
+              </a:lnSpc>
+            </a:pPr>
+            <a:r>
+              <a:rPr sz="2000" b="0">
+                <a:solidFill>
+                  <a:srgbClr val="756E65"/>
+                </a:solidFill>
+                <a:latin typeface="Lexend"/>
+              </a:rPr>
+              <a:t>allowed to see different fields.</a:t>
             </a:r>
           </a:p>
         </p:txBody>
@@ -11978,7 +12010,7 @@
         </p:blipFill>
         <p:spPr>
           <a:xfrm>
-            <a:off x="609600" y="3185160"/>
+            <a:off x="609600" y="3020060"/>
             <a:ext cx="1016000" cy="1016000"/>
           </a:xfrm>
           <a:prstGeom prst="rect">
@@ -11994,7 +12026,7 @@
         </p:nvSpPr>
         <p:spPr>
           <a:xfrm>
-            <a:off x="2070100" y="3147060"/>
+            <a:off x="2070100" y="2981960"/>
             <a:ext cx="9563100" cy="619760"/>
           </a:xfrm>
           <a:prstGeom prst="rect">
@@ -12033,8 +12065,8 @@
         </p:nvSpPr>
         <p:spPr>
           <a:xfrm>
-            <a:off x="2070100" y="3931920"/>
-            <a:ext cx="9563100" cy="355600"/>
+            <a:off x="2070100" y="3766820"/>
+            <a:ext cx="9563100" cy="685800"/>
           </a:xfrm>
           <a:prstGeom prst="rect">
             <a:avLst/>
@@ -12059,7 +12091,23 @@
                 </a:solidFill>
                 <a:latin typeface="Lexend"/>
               </a:rPr>
-              <a:t>Then comes the Schema gate.</a:t>
+              <a:t>When every Stage 4 checklist line is done, and no section of the document</a:t>
+            </a:r>
+          </a:p>
+          <a:p>
+            <a:pPr algn="l">
+              <a:lnSpc>
+                <a:spcPts val="2600"/>
+              </a:lnSpc>
+            </a:pPr>
+            <a:r>
+              <a:rPr sz="2000" b="0">
+                <a:solidFill>
+                  <a:srgbClr val="756E65"/>
+                </a:solidFill>
+                <a:latin typeface="Lexend"/>
+              </a:rPr>
+              <a:t>still says pending, the engine moves the app on without anyone...</a:t>
             </a:r>
           </a:p>
         </p:txBody>
@@ -14464,7 +14512,7 @@
         </p:blipFill>
         <p:spPr>
           <a:xfrm>
-            <a:off x="609600" y="3185160"/>
+            <a:off x="609600" y="3020060"/>
             <a:ext cx="1016000" cy="1016000"/>
           </a:xfrm>
           <a:prstGeom prst="rect">
@@ -14480,7 +14528,7 @@
         </p:nvSpPr>
         <p:spPr>
           <a:xfrm>
-            <a:off x="2070100" y="3147060"/>
+            <a:off x="2070100" y="2981960"/>
             <a:ext cx="9563100" cy="619760"/>
           </a:xfrm>
           <a:prstGeom prst="rect">
@@ -14519,8 +14567,8 @@
         </p:nvSpPr>
         <p:spPr>
           <a:xfrm>
-            <a:off x="2070100" y="3931920"/>
-            <a:ext cx="9563100" cy="355600"/>
+            <a:off x="2070100" y="3766820"/>
+            <a:ext cx="9563100" cy="685800"/>
           </a:xfrm>
           <a:prstGeom prst="rect">
             <a:avLst/>
@@ -14545,7 +14593,23 @@
                 </a:solidFill>
                 <a:latin typeface="Lexend"/>
               </a:rPr>
-              <a:t>Stage 4 is called Schema.</a:t>
+              <a:t>A schema is the plan of the tables that hold the data: which tables exist,</a:t>
+            </a:r>
+          </a:p>
+          <a:p>
+            <a:pPr algn="l">
+              <a:lnSpc>
+                <a:spcPts val="2600"/>
+              </a:lnSpc>
+            </a:pPr>
+            <a:r>
+              <a:rPr sz="2000" b="0">
+                <a:solidFill>
+                  <a:srgbClr val="756E65"/>
+                </a:solidFill>
+                <a:latin typeface="Lexend"/>
+              </a:rPr>
+              <a:t>which columns each one has, and who may read or write them.</a:t>
             </a:r>
           </a:p>
         </p:txBody>
@@ -14991,7 +15055,7 @@
                 </a:solidFill>
                 <a:latin typeface="Lexend"/>
               </a:rPr>
-              <a:t>Where does the list of tables come from?</a:t>
+              <a:t>The kits chosen earlier each bring their own tables.</a:t>
             </a:r>
           </a:p>
         </p:txBody>
